--- a/m1/diapositivos/sessao-07-m1-f07.pptx
+++ b/m1/diapositivos/sessao-07-m1-f07.pptx
@@ -3956,7 +3956,35 @@
                 <a:ea typeface="Arial" pitchFamily="34" charset="-122"/>
                 <a:cs typeface="Arial" pitchFamily="34" charset="-120"/>
               </a:rPr>
-              <a:t>Fernão Lopes, Crónica de D. João I (edição de 1897), cap. CXVI.</a:t>
+              <a:t>Fernão Lopes, </a:t>
+            </a:r>
+            <a:pPr indent="0" marL="0">
+              <a:buNone/>
+            </a:pPr>
+            <a:r>
+              <a:rPr lang="en-US" sz="1200" i="1" dirty="0">
+                <a:solidFill>
+                  <a:srgbClr val="A9A79F"/>
+                </a:solidFill>
+                <a:latin typeface="Arial" pitchFamily="34" charset="0"/>
+                <a:ea typeface="Arial" pitchFamily="34" charset="-122"/>
+                <a:cs typeface="Arial" pitchFamily="34" charset="-120"/>
+              </a:rPr>
+              <a:t>Crónica de D. João I</a:t>
+            </a:r>
+            <a:pPr indent="0" marL="0">
+              <a:buNone/>
+            </a:pPr>
+            <a:r>
+              <a:rPr lang="en-US" sz="1200" dirty="0">
+                <a:solidFill>
+                  <a:srgbClr val="A9A79F"/>
+                </a:solidFill>
+                <a:latin typeface="Arial" pitchFamily="34" charset="0"/>
+                <a:ea typeface="Arial" pitchFamily="34" charset="-122"/>
+                <a:cs typeface="Arial" pitchFamily="34" charset="-120"/>
+              </a:rPr>
+              <a:t> (edição de 1897), cap. CXVI.</a:t>
             </a:r>
             <a:endParaRPr lang="en-US" sz="1200" dirty="0"/>
           </a:p>
@@ -4276,7 +4304,35 @@
                 <a:ea typeface="Arial" pitchFamily="34" charset="-122"/>
                 <a:cs typeface="Arial" pitchFamily="34" charset="-120"/>
               </a:rPr>
-              <a:t>Fernão Lopes, Crónica de D. João I (edição de 1897), cap. CXLVIII.</a:t>
+              <a:t>Fernão Lopes, </a:t>
+            </a:r>
+            <a:pPr indent="0" marL="0">
+              <a:buNone/>
+            </a:pPr>
+            <a:r>
+              <a:rPr lang="en-US" sz="1200" i="1" dirty="0">
+                <a:solidFill>
+                  <a:srgbClr val="A9A79F"/>
+                </a:solidFill>
+                <a:latin typeface="Arial" pitchFamily="34" charset="0"/>
+                <a:ea typeface="Arial" pitchFamily="34" charset="-122"/>
+                <a:cs typeface="Arial" pitchFamily="34" charset="-120"/>
+              </a:rPr>
+              <a:t>Crónica de D. João I</a:t>
+            </a:r>
+            <a:pPr indent="0" marL="0">
+              <a:buNone/>
+            </a:pPr>
+            <a:r>
+              <a:rPr lang="en-US" sz="1200" dirty="0">
+                <a:solidFill>
+                  <a:srgbClr val="A9A79F"/>
+                </a:solidFill>
+                <a:latin typeface="Arial" pitchFamily="34" charset="0"/>
+                <a:ea typeface="Arial" pitchFamily="34" charset="-122"/>
+                <a:cs typeface="Arial" pitchFamily="34" charset="-120"/>
+              </a:rPr>
+              <a:t> (edição de 1897), cap. CXLVIII.</a:t>
             </a:r>
             <a:endParaRPr lang="en-US" sz="1200" dirty="0"/>
           </a:p>
@@ -4616,7 +4672,35 @@
                 <a:ea typeface="Arial" pitchFamily="34" charset="-122"/>
                 <a:cs typeface="Arial" pitchFamily="34" charset="-120"/>
               </a:rPr>
-              <a:t>Fernão Lopes, Crónica de D. João I (edição de 1897), cap. CXLVIII.</a:t>
+              <a:t>Fernão Lopes, </a:t>
+            </a:r>
+            <a:pPr indent="0" marL="0">
+              <a:buNone/>
+            </a:pPr>
+            <a:r>
+              <a:rPr lang="en-US" sz="1200" i="1" dirty="0">
+                <a:solidFill>
+                  <a:srgbClr val="A9A79F"/>
+                </a:solidFill>
+                <a:latin typeface="Arial" pitchFamily="34" charset="0"/>
+                <a:ea typeface="Arial" pitchFamily="34" charset="-122"/>
+                <a:cs typeface="Arial" pitchFamily="34" charset="-120"/>
+              </a:rPr>
+              <a:t>Crónica de D. João I</a:t>
+            </a:r>
+            <a:pPr indent="0" marL="0">
+              <a:buNone/>
+            </a:pPr>
+            <a:r>
+              <a:rPr lang="en-US" sz="1200" dirty="0">
+                <a:solidFill>
+                  <a:srgbClr val="A9A79F"/>
+                </a:solidFill>
+                <a:latin typeface="Arial" pitchFamily="34" charset="0"/>
+                <a:ea typeface="Arial" pitchFamily="34" charset="-122"/>
+                <a:cs typeface="Arial" pitchFamily="34" charset="-120"/>
+              </a:rPr>
+              <a:t> (edição de 1897), cap. CXLVIII.</a:t>
             </a:r>
             <a:endParaRPr lang="en-US" sz="1200" dirty="0"/>
           </a:p>
